--- a/classes/parte-4-mlops/194-versionado-de-datos-con-dvc/clase-194-versionado-de-datos-con-dvc-presentacion.pptx
+++ b/classes/parte-4-mlops/194-versionado-de-datos-con-dvc/clase-194-versionado-de-datos-con-dvc-presentacion.pptx
@@ -3272,7 +3272,7 @@
                 </a:solidFill>
                 <a:latin typeface="Segoe UI"/>
               </a:rPr>
-              <a:t>Parte: 4 — MLOps · Fuente: Huyen, Designing Machine Learning Systems cap. 6 + docs oficiales DVC 3.x.  Duración estimada: 75 min.</a:t>
+              <a:t>Parte: 4 — MLOps · Fuente: Huyen, Designing Machine Learning Systems cap. 6 + docs oficiales DVC 3.x.  Duración estimada: 75 min. · Nivel: Avanzado</a:t>
             </a:r>
           </a:p>
         </p:txBody>
@@ -3581,7 +3581,7 @@
                 </a:solidFill>
                 <a:latin typeface="Segoe UI"/>
               </a:rPr>
-              <a:t>Parte: 4 — MLOps · Fuente: Huyen, Designing Machine Learning Systems cap. 6 + docs oficiales DVC 3.x.  Duración estimada: 75 min.</a:t>
+              <a:t>Parte: 4 — MLOps · Fuente: Huyen, Designing Machine Learning Systems cap. 6 + docs oficiales DVC 3.x.  Duración estimada: 75 min. · Nivel: Avanzado</a:t>
             </a:r>
           </a:p>
         </p:txBody>
